--- a/examples/02-market-entry/deck.pptx
+++ b/examples/02-market-entry/deck.pptx
@@ -125,6 +125,17 @@
   <c:chart>
     <c:autoTitleDeleted val="1"/>
     <c:plotArea>
+      <c:layout>
+        <c:manualLayout>
+          <c:layoutTarget val="inner"/>
+          <c:xMode val="edge"/>
+          <c:yMode val="edge"/>
+          <c:x val="0.1158"/>
+          <c:y val="0.0200"/>
+          <c:w val="0.8742"/>
+          <c:h val="0.9600"/>
+        </c:manualLayout>
+      </c:layout>
       <c:barChart>
         <c:barDir val="bar"/>
         <c:grouping val="clustered"/>
@@ -295,7 +306,7 @@
       <c:valAx>
         <c:axId val="-2113994440"/>
         <c:scaling>
-          <c:max val="243.434"/>
+          <c:max val="222.2904221155705"/>
           <c:min val="0.0"/>
         </c:scaling>
         <c:delete/>
@@ -723,6 +734,17 @@
   <c:chart>
     <c:autoTitleDeleted val="1"/>
     <c:plotArea>
+      <c:layout>
+        <c:manualLayout>
+          <c:layoutTarget val="inner"/>
+          <c:xMode val="edge"/>
+          <c:yMode val="edge"/>
+          <c:x val="0.1158"/>
+          <c:y val="0.0200"/>
+          <c:w val="0.8742"/>
+          <c:h val="0.9600"/>
+        </c:manualLayout>
+      </c:layout>
       <c:barChart>
         <c:barDir val="bar"/>
         <c:grouping val="clustered"/>
@@ -893,7 +915,7 @@
       <c:valAx>
         <c:axId val="-2113994440"/>
         <c:scaling>
-          <c:max val="29392.62"/>
+          <c:max val="27232.558351333617"/>
           <c:min val="0.0"/>
         </c:scaling>
         <c:delete/>
@@ -939,6 +961,17 @@
   <c:chart>
     <c:autoTitleDeleted val="1"/>
     <c:plotArea>
+      <c:layout>
+        <c:manualLayout>
+          <c:layoutTarget val="inner"/>
+          <c:xMode val="edge"/>
+          <c:yMode val="edge"/>
+          <c:x val="0.1158"/>
+          <c:y val="0.0200"/>
+          <c:w val="0.8742"/>
+          <c:h val="0.9600"/>
+        </c:manualLayout>
+      </c:layout>
       <c:barChart>
         <c:barDir val="bar"/>
         <c:grouping val="clustered"/>
@@ -1109,7 +1142,7 @@
       <c:valAx>
         <c:axId val="-2113994440"/>
         <c:scaling>
-          <c:max val="4.012"/>
+          <c:max val="3.6114382902756357"/>
           <c:min val="0.0"/>
         </c:scaling>
         <c:delete/>
@@ -1155,6 +1188,17 @@
   <c:chart>
     <c:autoTitleDeleted val="1"/>
     <c:plotArea>
+      <c:layout>
+        <c:manualLayout>
+          <c:layoutTarget val="inner"/>
+          <c:xMode val="edge"/>
+          <c:yMode val="edge"/>
+          <c:x val="0.1158"/>
+          <c:y val="0.0200"/>
+          <c:w val="0.8742"/>
+          <c:h val="0.9600"/>
+        </c:manualLayout>
+      </c:layout>
       <c:barChart>
         <c:barDir val="bar"/>
         <c:grouping val="clustered"/>
@@ -1325,7 +1369,7 @@
       <c:valAx>
         <c:axId val="-2113994440"/>
         <c:scaling>
-          <c:max val="7.316"/>
+          <c:max val="6.493226661791746"/>
           <c:min val="0.0"/>
         </c:scaling>
         <c:delete/>
@@ -1414,9 +1458,10 @@
               <c:idx val="9"/>
               <c:tx>
                 <c:rich>
-                  <a:bodyPr/>
+                  <a:bodyPr wrap="none"/>
                   <a:lstStyle/>
                   <a:p>
+                    <a:pPr algn="l"/>
                     <a:r>
                       <a:rPr sz="1200" b="0">
                         <a:solidFill>
@@ -1552,9 +1597,10 @@
               <c:idx val="9"/>
               <c:tx>
                 <c:rich>
-                  <a:bodyPr/>
+                  <a:bodyPr wrap="none"/>
                   <a:lstStyle/>
                   <a:p>
+                    <a:pPr algn="l"/>
                     <a:r>
                       <a:rPr sz="1200" b="0">
                         <a:solidFill>
@@ -1690,9 +1736,10 @@
               <c:idx val="9"/>
               <c:tx>
                 <c:rich>
-                  <a:bodyPr/>
+                  <a:bodyPr wrap="none"/>
                   <a:lstStyle/>
                   <a:p>
+                    <a:pPr algn="l"/>
                     <a:r>
                       <a:rPr sz="1200" b="0">
                         <a:solidFill>
@@ -1828,9 +1875,10 @@
               <c:idx val="9"/>
               <c:tx>
                 <c:rich>
-                  <a:bodyPr/>
+                  <a:bodyPr wrap="none"/>
                   <a:lstStyle/>
                   <a:p>
+                    <a:pPr algn="l"/>
                     <a:r>
                       <a:rPr sz="1200" b="1">
                         <a:solidFill>
@@ -9862,8 +9910,8 @@
         </p:nvSpPr>
         <p:spPr>
           <a:xfrm>
-            <a:off x="8097520" y="2014220"/>
-            <a:ext cx="3637280" cy="4254500"/>
+            <a:off x="8097520" y="1959864"/>
+            <a:ext cx="3637280" cy="4308856"/>
           </a:xfrm>
           <a:prstGeom prst="rect">
             <a:avLst/>
@@ -10499,8 +10547,8 @@
         </p:nvSpPr>
         <p:spPr>
           <a:xfrm>
-            <a:off x="8097520" y="2014220"/>
-            <a:ext cx="3637280" cy="4254500"/>
+            <a:off x="8097520" y="1959864"/>
+            <a:ext cx="3637280" cy="4308856"/>
           </a:xfrm>
           <a:prstGeom prst="rect">
             <a:avLst/>
@@ -10842,8 +10890,8 @@
         </p:nvSpPr>
         <p:spPr>
           <a:xfrm>
-            <a:off x="8097520" y="2014220"/>
-            <a:ext cx="3637280" cy="4254500"/>
+            <a:off x="8097520" y="1959864"/>
+            <a:ext cx="3637280" cy="4308856"/>
           </a:xfrm>
           <a:prstGeom prst="rect">
             <a:avLst/>
@@ -11205,8 +11253,8 @@
         </p:nvSpPr>
         <p:spPr>
           <a:xfrm>
-            <a:off x="8097520" y="2014220"/>
-            <a:ext cx="3637280" cy="4254500"/>
+            <a:off x="8097520" y="1959864"/>
+            <a:ext cx="3637280" cy="4308856"/>
           </a:xfrm>
           <a:prstGeom prst="rect">
             <a:avLst/>
@@ -11548,8 +11596,8 @@
         </p:nvSpPr>
         <p:spPr>
           <a:xfrm>
-            <a:off x="8097520" y="2014220"/>
-            <a:ext cx="3637280" cy="4254500"/>
+            <a:off x="8097520" y="1959864"/>
+            <a:ext cx="3637280" cy="4308856"/>
           </a:xfrm>
           <a:prstGeom prst="rect">
             <a:avLst/>
@@ -13374,9 +13422,9 @@
 </file>
 
 <file path=ppt/theme/theme1.xml><?xml version="1.0" encoding="utf-8"?>
-<a:theme xmlns:a="http://schemas.openxmlformats.org/drawingml/2006/main" name="SoWhat">
+<a:theme xmlns:a="http://schemas.openxmlformats.org/drawingml/2006/main" name="SoWhat Decks">
   <a:themeElements>
-    <a:clrScheme name="SoWhat">
+    <a:clrScheme name="SoWhat Decks">
       <a:dk1>
         <a:srgbClr val="1E2329"/>
       </a:dk1>
@@ -13414,7 +13462,7 @@
         <a:srgbClr val="5A6472"/>
       </a:folHlink>
     </a:clrScheme>
-    <a:fontScheme name="SoWhat">
+    <a:fontScheme name="SoWhat Decks">
       <a:majorFont>
         <a:latin typeface="Georgia"/>
         <a:ea typeface=""/>
